--- a/presentation/КосмоХакатон_защита.pptx
+++ b/presentation/КосмоХакатон_защита.pptx
@@ -5890,7 +5890,7 @@
                 <a:ea typeface="Arial" pitchFamily="34" charset="-122"/>
                 <a:cs typeface="Arial" pitchFamily="34" charset="-120"/>
               </a:rPr>
-              <a:t>Ни один ID (C65, G_MUR, S01…) и ни одно число не захардкожены: состав, плоскости и параметры целиком читаются из файла. Проверено на синтетическом сценарии с 5 плоскостями, 2 шлюзами и незнакомыми идентификаторами.</a:t>
+              <a:t>Ни один ID и ни одно число не захардкожены: состав, плоскости и параметры целиком читаются из файла. Валидация покрывает схему, диапазоны, типы и ссылки, указывая проблемное поле, — 44 граничных кейса в тестах; официальная geometry.validate — финальный рубеж.</a:t>
             </a:r>
             <a:endParaRPr lang="en-US" sz="1600" dirty="0"/>
           </a:p>
@@ -6120,7 +6120,7 @@
         </p:nvSpPr>
         <p:spPr>
           <a:xfrm>
-            <a:off x="548640" y="1700784"/>
+            <a:off x="548640" y="1682496"/>
             <a:ext cx="128016" cy="128016"/>
           </a:xfrm>
           <a:prstGeom prst="ellipse">
@@ -6140,7 +6140,7 @@
         </p:nvSpPr>
         <p:spPr>
           <a:xfrm>
-            <a:off x="841248" y="1572768"/>
+            <a:off x="841248" y="1554480"/>
             <a:ext cx="5029200" cy="365760"/>
           </a:xfrm>
           <a:prstGeom prst="rect">
@@ -6179,7 +6179,7 @@
         </p:nvSpPr>
         <p:spPr>
           <a:xfrm>
-            <a:off x="841248" y="1938528"/>
+            <a:off x="841248" y="1920240"/>
             <a:ext cx="5074920" cy="685800"/>
           </a:xfrm>
           <a:prstGeom prst="rect">
@@ -6218,7 +6218,7 @@
         </p:nvSpPr>
         <p:spPr>
           <a:xfrm>
-            <a:off x="548640" y="2779776"/>
+            <a:off x="548640" y="2642616"/>
             <a:ext cx="128016" cy="128016"/>
           </a:xfrm>
           <a:prstGeom prst="ellipse">
@@ -6238,7 +6238,7 @@
         </p:nvSpPr>
         <p:spPr>
           <a:xfrm>
-            <a:off x="841248" y="2651760"/>
+            <a:off x="841248" y="2514600"/>
             <a:ext cx="5029200" cy="365760"/>
           </a:xfrm>
           <a:prstGeom prst="rect">
@@ -6277,7 +6277,7 @@
         </p:nvSpPr>
         <p:spPr>
           <a:xfrm>
-            <a:off x="841248" y="3017520"/>
+            <a:off x="841248" y="2880360"/>
             <a:ext cx="5074920" cy="685800"/>
           </a:xfrm>
           <a:prstGeom prst="rect">
@@ -6316,7 +6316,7 @@
         </p:nvSpPr>
         <p:spPr>
           <a:xfrm>
-            <a:off x="548640" y="3858768"/>
+            <a:off x="548640" y="3602736"/>
             <a:ext cx="128016" cy="128016"/>
           </a:xfrm>
           <a:prstGeom prst="ellipse">
@@ -6336,7 +6336,7 @@
         </p:nvSpPr>
         <p:spPr>
           <a:xfrm>
-            <a:off x="841248" y="3730752"/>
+            <a:off x="841248" y="3474720"/>
             <a:ext cx="5029200" cy="365760"/>
           </a:xfrm>
           <a:prstGeom prst="rect">
@@ -6361,7 +6361,7 @@
                 <a:ea typeface="Arial" pitchFamily="34" charset="-122"/>
                 <a:cs typeface="Arial" pitchFamily="34" charset="-120"/>
               </a:rPr>
-              <a:t>Маршрут — детерминированный BFS</a:t>
+              <a:t>RAAN/фаза — проектные параметры</a:t>
             </a:r>
             <a:endParaRPr lang="en-US" sz="1550" dirty="0"/>
           </a:p>
@@ -6375,7 +6375,7 @@
         </p:nvSpPr>
         <p:spPr>
           <a:xfrm>
-            <a:off x="841248" y="4096512"/>
+            <a:off x="841248" y="3840480"/>
             <a:ext cx="5074920" cy="685800"/>
           </a:xfrm>
           <a:prstGeom prst="rect">
@@ -6400,7 +6400,7 @@
                 <a:ea typeface="Arial" pitchFamily="34" charset="-122"/>
                 <a:cs typeface="Arial" pitchFamily="34" charset="-120"/>
               </a:rPr>
-              <a:t>минимум рёбер, при равенстве — лексикографически наименьший путь; наземные узлы не ретранслируют</a:t>
+              <a:t>задаются до развёртывания; сравниваем конфигурации, а не «управляем спутником в полёте»</a:t>
             </a:r>
             <a:endParaRPr lang="en-US" sz="1200" dirty="0"/>
           </a:p>
@@ -6414,7 +6414,7 @@
         </p:nvSpPr>
         <p:spPr>
           <a:xfrm>
-            <a:off x="548640" y="4937760"/>
+            <a:off x="548640" y="4562856"/>
             <a:ext cx="128016" cy="128016"/>
           </a:xfrm>
           <a:prstGeom prst="ellipse">
@@ -6434,7 +6434,7 @@
         </p:nvSpPr>
         <p:spPr>
           <a:xfrm>
-            <a:off x="841248" y="4809744"/>
+            <a:off x="841248" y="4434840"/>
             <a:ext cx="5029200" cy="365760"/>
           </a:xfrm>
           <a:prstGeom prst="rect">
@@ -6459,6 +6459,104 @@
                 <a:ea typeface="Arial" pitchFamily="34" charset="-122"/>
                 <a:cs typeface="Arial" pitchFamily="34" charset="-120"/>
               </a:rPr>
+              <a:t>Маршрут — Dijkstra по длине линий связи</a:t>
+            </a:r>
+            <a:endParaRPr lang="en-US" sz="1550" dirty="0"/>
+          </a:p>
+        </p:txBody>
+      </p:sp>
+      <p:sp>
+        <p:nvSpPr>
+          <p:cNvPr id="19" name="Text 16"/>
+          <p:cNvSpPr/>
+          <p:nvPr/>
+        </p:nvSpPr>
+        <p:spPr>
+          <a:xfrm>
+            <a:off x="841248" y="4800600"/>
+            <a:ext cx="5074920" cy="685800"/>
+          </a:xfrm>
+          <a:prstGeom prst="rect">
+            <a:avLst/>
+          </a:prstGeom>
+          <a:noFill/>
+          <a:ln/>
+        </p:spPr>
+        <p:txBody>
+          <a:bodyPr wrap="square" lIns="0" tIns="0" rIns="0" bIns="0" rtlCol="0" anchor="ctr"/>
+          <a:lstStyle/>
+          <a:p>
+            <a:pPr indent="0" marL="0">
+              <a:buNone/>
+            </a:pPr>
+            <a:r>
+              <a:rPr lang="en-US" sz="1200" dirty="0">
+                <a:solidFill>
+                  <a:srgbClr val="5B6B7C"/>
+                </a:solidFill>
+                <a:latin typeface="Arial" pitchFamily="34" charset="0"/>
+                <a:ea typeface="Arial" pitchFamily="34" charset="-122"/>
+                <a:cs typeface="Arial" pitchFamily="34" charset="-120"/>
+              </a:rPr>
+              <a:t>минимум суммарной геометрической длины на графе текущего отсчёта; tie-break детерминирован; наземные узлы не ретранслируют</a:t>
+            </a:r>
+            <a:endParaRPr lang="en-US" sz="1200" dirty="0"/>
+          </a:p>
+        </p:txBody>
+      </p:sp>
+      <p:sp>
+        <p:nvSpPr>
+          <p:cNvPr id="20" name="Shape 17"/>
+          <p:cNvSpPr/>
+          <p:nvPr/>
+        </p:nvSpPr>
+        <p:spPr>
+          <a:xfrm>
+            <a:off x="548640" y="5522976"/>
+            <a:ext cx="128016" cy="128016"/>
+          </a:xfrm>
+          <a:prstGeom prst="ellipse">
+            <a:avLst/>
+          </a:prstGeom>
+          <a:solidFill>
+            <a:srgbClr val="14507E"/>
+          </a:solidFill>
+          <a:ln/>
+        </p:spPr>
+      </p:sp>
+      <p:sp>
+        <p:nvSpPr>
+          <p:cNvPr id="21" name="Text 18"/>
+          <p:cNvSpPr/>
+          <p:nvPr/>
+        </p:nvSpPr>
+        <p:spPr>
+          <a:xfrm>
+            <a:off x="841248" y="5394960"/>
+            <a:ext cx="5029200" cy="365760"/>
+          </a:xfrm>
+          <a:prstGeom prst="rect">
+            <a:avLst/>
+          </a:prstGeom>
+          <a:noFill/>
+          <a:ln/>
+        </p:spPr>
+        <p:txBody>
+          <a:bodyPr wrap="square" lIns="0" tIns="0" rIns="0" bIns="0" rtlCol="0" anchor="ctr"/>
+          <a:lstStyle/>
+          <a:p>
+            <a:pPr indent="0" marL="0">
+              <a:buNone/>
+            </a:pPr>
+            <a:r>
+              <a:rPr lang="en-US" sz="1550" b="1" dirty="0">
+                <a:solidFill>
+                  <a:srgbClr val="16222E"/>
+                </a:solidFill>
+                <a:latin typeface="Arial" pitchFamily="34" charset="0"/>
+                <a:ea typeface="Arial" pitchFamily="34" charset="-122"/>
+                <a:cs typeface="Arial" pitchFamily="34" charset="-120"/>
+              </a:rPr>
               <a:t>Каждый перерыв имеет причину</a:t>
             </a:r>
             <a:endParaRPr lang="en-US" sz="1550" dirty="0"/>
@@ -6467,13 +6565,13 @@
       </p:sp>
       <p:sp>
         <p:nvSpPr>
-          <p:cNvPr id="19" name="Text 16"/>
-          <p:cNvSpPr/>
-          <p:nvPr/>
-        </p:nvSpPr>
-        <p:spPr>
-          <a:xfrm>
-            <a:off x="841248" y="5175504"/>
+          <p:cNvPr id="22" name="Text 19"/>
+          <p:cNvSpPr/>
+          <p:nvPr/>
+        </p:nvSpPr>
+        <p:spPr>
+          <a:xfrm>
+            <a:off x="841248" y="5760720"/>
             <a:ext cx="5074920" cy="685800"/>
           </a:xfrm>
           <a:prstGeom prst="rect">
@@ -6506,7 +6604,7 @@
       </p:sp>
       <p:sp>
         <p:nvSpPr>
-          <p:cNvPr id="20" name="Text 17"/>
+          <p:cNvPr id="23" name="Text 20"/>
           <p:cNvSpPr/>
           <p:nvPr/>
         </p:nvSpPr>
@@ -9409,7 +9507,7 @@
                 <a:ea typeface="Arial" pitchFamily="34" charset="-122"/>
                 <a:cs typeface="Arial" pitchFamily="34" charset="-120"/>
               </a:rPr>
-              <a:t>83</a:t>
+              <a:t>86</a:t>
             </a:r>
             <a:endParaRPr lang="en-US" sz="5400" dirty="0"/>
           </a:p>
